--- a/presentation/SIH2026_AlertNex_SIH_Template_6Slides.pptx
+++ b/presentation/SIH2026_AlertNex_SIH_Template_6Slides.pptx
@@ -5,14 +5,14 @@
     <p:sldMasterId id="2147483648" r:id="rId1"/>
   </p:sldMasterIdLst>
   <p:sldIdLst>
-    <p:sldId id="256" r:id="rId2"/>
-    <p:sldId id="257" r:id="rId3"/>
-    <p:sldId id="258" r:id="rId4"/>
-    <p:sldId id="259" r:id="rId5"/>
-    <p:sldId id="260" r:id="rId6"/>
-    <p:sldId id="261" r:id="rId7"/>
+    <p:sldId id="256" r:id="rId7"/>
+    <p:sldId id="257" r:id="rId8"/>
+    <p:sldId id="258" r:id="rId9"/>
+    <p:sldId id="259" r:id="rId10"/>
+    <p:sldId id="260" r:id="rId11"/>
+    <p:sldId id="261" r:id="rId12"/>
   </p:sldIdLst>
-  <p:sldSz cx="12192000" cy="6858000"/>
+  <p:sldSz cx="12191695" cy="6858000" type="screen4x3"/>
   <p:notesSz cx="6858000" cy="9144000"/>
   <p:defaultTextStyle>
     <a:defPPr>
@@ -109,99 +109,7 @@
       </a:defRPr>
     </a:lvl9pPr>
   </p:defaultTextStyle>
-  <p:extLst>
-    <p:ext uri="{EFAFB233-063F-42B5-8137-9DF3F51BA10A}">
-      <p15:sldGuideLst xmlns:p15="http://schemas.microsoft.com/office/powerpoint/2012/main">
-        <p15:guide id="1" orient="horz" pos="2160">
-          <p15:clr>
-            <a:srgbClr val="A4A3A4"/>
-          </p15:clr>
-        </p15:guide>
-        <p15:guide id="2" pos="2880">
-          <p15:clr>
-            <a:srgbClr val="A4A3A4"/>
-          </p15:clr>
-        </p15:guide>
-      </p15:sldGuideLst>
-    </p:ext>
-  </p:extLst>
 </p:presentation>
-</file>
-
-<file path=ppt/changesInfos/changesInfo1.xml><?xml version="1.0" encoding="utf-8"?>
-<pc:chgInfo xmlns:a="http://schemas.openxmlformats.org/drawingml/2006/main" xmlns:r="http://schemas.openxmlformats.org/officeDocument/2006/relationships" xmlns:ac="http://schemas.microsoft.com/office/drawing/2013/main/command" xmlns:pc="http://schemas.microsoft.com/office/powerpoint/2013/main/command">
-  <pc:docChgLst>
-    <pc:chgData name="ayush kumar" userId="f732a104cffdcd6c" providerId="LiveId" clId="{6382C869-4F11-408D-9083-868BF833C4DE}"/>
-    <pc:docChg chg="undo custSel modSld">
-      <pc:chgData name="ayush kumar" userId="f732a104cffdcd6c" providerId="LiveId" clId="{6382C869-4F11-408D-9083-868BF833C4DE}" dt="2026-09-04T17:43:00.390" v="68" actId="1076"/>
-      <pc:docMkLst>
-        <pc:docMk/>
-      </pc:docMkLst>
-      <pc:sldChg chg="modSp mod">
-        <pc:chgData name="ayush kumar" userId="f732a104cffdcd6c" providerId="LiveId" clId="{6382C869-4F11-408D-9083-868BF833C4DE}" dt="2026-09-04T17:38:35.047" v="15" actId="20577"/>
-        <pc:sldMkLst>
-          <pc:docMk/>
-          <pc:sldMk cId="0" sldId="256"/>
-        </pc:sldMkLst>
-        <pc:spChg chg="mod">
-          <ac:chgData name="ayush kumar" userId="f732a104cffdcd6c" providerId="LiveId" clId="{6382C869-4F11-408D-9083-868BF833C4DE}" dt="2026-09-04T17:35:06.959" v="2" actId="20577"/>
-          <ac:spMkLst>
-            <pc:docMk/>
-            <pc:sldMk cId="0" sldId="256"/>
-            <ac:spMk id="3" creationId="{00000000-0000-0000-0000-000000000000}"/>
-          </ac:spMkLst>
-        </pc:spChg>
-        <pc:spChg chg="mod">
-          <ac:chgData name="ayush kumar" userId="f732a104cffdcd6c" providerId="LiveId" clId="{6382C869-4F11-408D-9083-868BF833C4DE}" dt="2026-09-04T17:38:35.047" v="15" actId="20577"/>
-          <ac:spMkLst>
-            <pc:docMk/>
-            <pc:sldMk cId="0" sldId="256"/>
-            <ac:spMk id="5" creationId="{00000000-0000-0000-0000-000000000000}"/>
-          </ac:spMkLst>
-        </pc:spChg>
-      </pc:sldChg>
-      <pc:sldChg chg="modSp mod">
-        <pc:chgData name="ayush kumar" userId="f732a104cffdcd6c" providerId="LiveId" clId="{6382C869-4F11-408D-9083-868BF833C4DE}" dt="2026-09-04T17:43:00.390" v="68" actId="1076"/>
-        <pc:sldMkLst>
-          <pc:docMk/>
-          <pc:sldMk cId="0" sldId="257"/>
-        </pc:sldMkLst>
-        <pc:spChg chg="mod">
-          <ac:chgData name="ayush kumar" userId="f732a104cffdcd6c" providerId="LiveId" clId="{6382C869-4F11-408D-9083-868BF833C4DE}" dt="2026-09-04T17:42:14.789" v="41" actId="1076"/>
-          <ac:spMkLst>
-            <pc:docMk/>
-            <pc:sldMk cId="0" sldId="257"/>
-            <ac:spMk id="10" creationId="{00000000-0000-0000-0000-000000000000}"/>
-          </ac:spMkLst>
-        </pc:spChg>
-        <pc:spChg chg="mod">
-          <ac:chgData name="ayush kumar" userId="f732a104cffdcd6c" providerId="LiveId" clId="{6382C869-4F11-408D-9083-868BF833C4DE}" dt="2026-09-04T17:43:00.390" v="68" actId="1076"/>
-          <ac:spMkLst>
-            <pc:docMk/>
-            <pc:sldMk cId="0" sldId="257"/>
-            <ac:spMk id="13" creationId="{00000000-0000-0000-0000-000000000000}"/>
-          </ac:spMkLst>
-        </pc:spChg>
-        <pc:spChg chg="mod">
-          <ac:chgData name="ayush kumar" userId="f732a104cffdcd6c" providerId="LiveId" clId="{6382C869-4F11-408D-9083-868BF833C4DE}" dt="2026-09-04T17:42:43.486" v="55" actId="1036"/>
-          <ac:spMkLst>
-            <pc:docMk/>
-            <pc:sldMk cId="0" sldId="257"/>
-            <ac:spMk id="14" creationId="{00000000-0000-0000-0000-000000000000}"/>
-          </ac:spMkLst>
-        </pc:spChg>
-        <pc:spChg chg="mod">
-          <ac:chgData name="ayush kumar" userId="f732a104cffdcd6c" providerId="LiveId" clId="{6382C869-4F11-408D-9083-868BF833C4DE}" dt="2026-09-04T17:42:51.161" v="67" actId="1036"/>
-          <ac:spMkLst>
-            <pc:docMk/>
-            <pc:sldMk cId="0" sldId="257"/>
-            <ac:spMk id="15" creationId="{00000000-0000-0000-0000-000000000000}"/>
-          </ac:spMkLst>
-        </pc:spChg>
-      </pc:sldChg>
-    </pc:docChg>
-  </pc:docChgLst>
-</pc:chgInfo>
 </file>
 
 <file path=ppt/slideLayouts/slideLayout1.xml><?xml version="1.0" encoding="utf-8"?>
@@ -242,9 +150,10 @@
           <a:lstStyle/>
           <a:p>
             <a:r>
-              <a:rPr lang="en-US"/>
+              <a:rPr lang="en-US" smtClean="0"/>
               <a:t>Click to edit Master title style</a:t>
             </a:r>
+            <a:endParaRPr lang="en-US"/>
           </a:p>
         </p:txBody>
       </p:sp>
@@ -360,9 +269,10 @@
           </a:lstStyle>
           <a:p>
             <a:r>
-              <a:rPr lang="en-US"/>
+              <a:rPr lang="en-US" smtClean="0"/>
               <a:t>Click to edit Master subtitle style</a:t>
             </a:r>
+            <a:endParaRPr lang="en-US"/>
           </a:p>
         </p:txBody>
       </p:sp>
@@ -383,7 +293,7 @@
           <a:p>
             <a:fld id="{5BCAD085-E8A6-8845-BD4E-CB4CCA059FC4}" type="datetimeFigureOut">
               <a:rPr lang="en-US" smtClean="0"/>
-              <a:t>9/4/2026</a:t>
+              <a:t>1/27/13</a:t>
             </a:fld>
             <a:endParaRPr lang="en-US"/>
           </a:p>
@@ -477,9 +387,10 @@
           <a:lstStyle/>
           <a:p>
             <a:r>
-              <a:rPr lang="en-US"/>
+              <a:rPr lang="en-US" smtClean="0"/>
               <a:t>Click to edit Master title style</a:t>
             </a:r>
+            <a:endParaRPr lang="en-US"/>
           </a:p>
         </p:txBody>
       </p:sp>
@@ -500,37 +411,38 @@
           <a:p>
             <a:pPr lvl="0"/>
             <a:r>
-              <a:rPr lang="en-US"/>
+              <a:rPr lang="en-US" smtClean="0"/>
               <a:t>Click to edit Master text styles</a:t>
             </a:r>
           </a:p>
           <a:p>
             <a:pPr lvl="1"/>
             <a:r>
-              <a:rPr lang="en-US"/>
+              <a:rPr lang="en-US" smtClean="0"/>
               <a:t>Second level</a:t>
             </a:r>
           </a:p>
           <a:p>
             <a:pPr lvl="2"/>
             <a:r>
-              <a:rPr lang="en-US"/>
+              <a:rPr lang="en-US" smtClean="0"/>
               <a:t>Third level</a:t>
             </a:r>
           </a:p>
           <a:p>
             <a:pPr lvl="3"/>
             <a:r>
-              <a:rPr lang="en-US"/>
+              <a:rPr lang="en-US" smtClean="0"/>
               <a:t>Fourth level</a:t>
             </a:r>
           </a:p>
           <a:p>
             <a:pPr lvl="4"/>
             <a:r>
-              <a:rPr lang="en-US"/>
+              <a:rPr lang="en-US" smtClean="0"/>
               <a:t>Fifth level</a:t>
             </a:r>
+            <a:endParaRPr lang="en-US"/>
           </a:p>
         </p:txBody>
       </p:sp>
@@ -551,7 +463,7 @@
           <a:p>
             <a:fld id="{5BCAD085-E8A6-8845-BD4E-CB4CCA059FC4}" type="datetimeFigureOut">
               <a:rPr lang="en-US" smtClean="0"/>
-              <a:t>9/4/2026</a:t>
+              <a:t>1/27/13</a:t>
             </a:fld>
             <a:endParaRPr lang="en-US"/>
           </a:p>
@@ -650,9 +562,10 @@
           <a:lstStyle/>
           <a:p>
             <a:r>
-              <a:rPr lang="en-US"/>
+              <a:rPr lang="en-US" smtClean="0"/>
               <a:t>Click to edit Master title style</a:t>
             </a:r>
+            <a:endParaRPr lang="en-US"/>
           </a:p>
         </p:txBody>
       </p:sp>
@@ -678,37 +591,38 @@
           <a:p>
             <a:pPr lvl="0"/>
             <a:r>
-              <a:rPr lang="en-US"/>
+              <a:rPr lang="en-US" smtClean="0"/>
               <a:t>Click to edit Master text styles</a:t>
             </a:r>
           </a:p>
           <a:p>
             <a:pPr lvl="1"/>
             <a:r>
-              <a:rPr lang="en-US"/>
+              <a:rPr lang="en-US" smtClean="0"/>
               <a:t>Second level</a:t>
             </a:r>
           </a:p>
           <a:p>
             <a:pPr lvl="2"/>
             <a:r>
-              <a:rPr lang="en-US"/>
+              <a:rPr lang="en-US" smtClean="0"/>
               <a:t>Third level</a:t>
             </a:r>
           </a:p>
           <a:p>
             <a:pPr lvl="3"/>
             <a:r>
-              <a:rPr lang="en-US"/>
+              <a:rPr lang="en-US" smtClean="0"/>
               <a:t>Fourth level</a:t>
             </a:r>
           </a:p>
           <a:p>
             <a:pPr lvl="4"/>
             <a:r>
-              <a:rPr lang="en-US"/>
+              <a:rPr lang="en-US" smtClean="0"/>
               <a:t>Fifth level</a:t>
             </a:r>
+            <a:endParaRPr lang="en-US"/>
           </a:p>
         </p:txBody>
       </p:sp>
@@ -729,7 +643,7 @@
           <a:p>
             <a:fld id="{5BCAD085-E8A6-8845-BD4E-CB4CCA059FC4}" type="datetimeFigureOut">
               <a:rPr lang="en-US" smtClean="0"/>
-              <a:t>9/4/2026</a:t>
+              <a:t>1/27/13</a:t>
             </a:fld>
             <a:endParaRPr lang="en-US"/>
           </a:p>
@@ -823,9 +737,10 @@
           <a:lstStyle/>
           <a:p>
             <a:r>
-              <a:rPr lang="en-US"/>
+              <a:rPr lang="en-US" smtClean="0"/>
               <a:t>Click to edit Master title style</a:t>
             </a:r>
+            <a:endParaRPr lang="en-US"/>
           </a:p>
         </p:txBody>
       </p:sp>
@@ -846,37 +761,38 @@
           <a:p>
             <a:pPr lvl="0"/>
             <a:r>
-              <a:rPr lang="en-US"/>
+              <a:rPr lang="en-US" smtClean="0"/>
               <a:t>Click to edit Master text styles</a:t>
             </a:r>
           </a:p>
           <a:p>
             <a:pPr lvl="1"/>
             <a:r>
-              <a:rPr lang="en-US"/>
+              <a:rPr lang="en-US" smtClean="0"/>
               <a:t>Second level</a:t>
             </a:r>
           </a:p>
           <a:p>
             <a:pPr lvl="2"/>
             <a:r>
-              <a:rPr lang="en-US"/>
+              <a:rPr lang="en-US" smtClean="0"/>
               <a:t>Third level</a:t>
             </a:r>
           </a:p>
           <a:p>
             <a:pPr lvl="3"/>
             <a:r>
-              <a:rPr lang="en-US"/>
+              <a:rPr lang="en-US" smtClean="0"/>
               <a:t>Fourth level</a:t>
             </a:r>
           </a:p>
           <a:p>
             <a:pPr lvl="4"/>
             <a:r>
-              <a:rPr lang="en-US"/>
+              <a:rPr lang="en-US" smtClean="0"/>
               <a:t>Fifth level</a:t>
             </a:r>
+            <a:endParaRPr lang="en-US"/>
           </a:p>
         </p:txBody>
       </p:sp>
@@ -897,7 +813,7 @@
           <a:p>
             <a:fld id="{5BCAD085-E8A6-8845-BD4E-CB4CCA059FC4}" type="datetimeFigureOut">
               <a:rPr lang="en-US" smtClean="0"/>
-              <a:t>9/4/2026</a:t>
+              <a:t>1/27/13</a:t>
             </a:fld>
             <a:endParaRPr lang="en-US"/>
           </a:p>
@@ -1000,9 +916,10 @@
           </a:lstStyle>
           <a:p>
             <a:r>
-              <a:rPr lang="en-US"/>
+              <a:rPr lang="en-US" smtClean="0"/>
               <a:t>Click to edit Master title style</a:t>
             </a:r>
+            <a:endParaRPr lang="en-US"/>
           </a:p>
         </p:txBody>
       </p:sp>
@@ -1119,7 +1036,7 @@
           <a:p>
             <a:pPr lvl="0"/>
             <a:r>
-              <a:rPr lang="en-US"/>
+              <a:rPr lang="en-US" smtClean="0"/>
               <a:t>Click to edit Master text styles</a:t>
             </a:r>
           </a:p>
@@ -1142,7 +1059,7 @@
           <a:p>
             <a:fld id="{5BCAD085-E8A6-8845-BD4E-CB4CCA059FC4}" type="datetimeFigureOut">
               <a:rPr lang="en-US" smtClean="0"/>
-              <a:t>9/4/2026</a:t>
+              <a:t>1/27/13</a:t>
             </a:fld>
             <a:endParaRPr lang="en-US"/>
           </a:p>
@@ -1236,9 +1153,10 @@
           <a:lstStyle/>
           <a:p>
             <a:r>
-              <a:rPr lang="en-US"/>
+              <a:rPr lang="en-US" smtClean="0"/>
               <a:t>Click to edit Master title style</a:t>
             </a:r>
+            <a:endParaRPr lang="en-US"/>
           </a:p>
         </p:txBody>
       </p:sp>
@@ -1292,37 +1210,38 @@
           <a:p>
             <a:pPr lvl="0"/>
             <a:r>
-              <a:rPr lang="en-US"/>
+              <a:rPr lang="en-US" smtClean="0"/>
               <a:t>Click to edit Master text styles</a:t>
             </a:r>
           </a:p>
           <a:p>
             <a:pPr lvl="1"/>
             <a:r>
-              <a:rPr lang="en-US"/>
+              <a:rPr lang="en-US" smtClean="0"/>
               <a:t>Second level</a:t>
             </a:r>
           </a:p>
           <a:p>
             <a:pPr lvl="2"/>
             <a:r>
-              <a:rPr lang="en-US"/>
+              <a:rPr lang="en-US" smtClean="0"/>
               <a:t>Third level</a:t>
             </a:r>
           </a:p>
           <a:p>
             <a:pPr lvl="3"/>
             <a:r>
-              <a:rPr lang="en-US"/>
+              <a:rPr lang="en-US" smtClean="0"/>
               <a:t>Fourth level</a:t>
             </a:r>
           </a:p>
           <a:p>
             <a:pPr lvl="4"/>
             <a:r>
-              <a:rPr lang="en-US"/>
+              <a:rPr lang="en-US" smtClean="0"/>
               <a:t>Fifth level</a:t>
             </a:r>
+            <a:endParaRPr lang="en-US"/>
           </a:p>
         </p:txBody>
       </p:sp>
@@ -1376,37 +1295,38 @@
           <a:p>
             <a:pPr lvl="0"/>
             <a:r>
-              <a:rPr lang="en-US"/>
+              <a:rPr lang="en-US" smtClean="0"/>
               <a:t>Click to edit Master text styles</a:t>
             </a:r>
           </a:p>
           <a:p>
             <a:pPr lvl="1"/>
             <a:r>
-              <a:rPr lang="en-US"/>
+              <a:rPr lang="en-US" smtClean="0"/>
               <a:t>Second level</a:t>
             </a:r>
           </a:p>
           <a:p>
             <a:pPr lvl="2"/>
             <a:r>
-              <a:rPr lang="en-US"/>
+              <a:rPr lang="en-US" smtClean="0"/>
               <a:t>Third level</a:t>
             </a:r>
           </a:p>
           <a:p>
             <a:pPr lvl="3"/>
             <a:r>
-              <a:rPr lang="en-US"/>
+              <a:rPr lang="en-US" smtClean="0"/>
               <a:t>Fourth level</a:t>
             </a:r>
           </a:p>
           <a:p>
             <a:pPr lvl="4"/>
             <a:r>
-              <a:rPr lang="en-US"/>
+              <a:rPr lang="en-US" smtClean="0"/>
               <a:t>Fifth level</a:t>
             </a:r>
+            <a:endParaRPr lang="en-US"/>
           </a:p>
         </p:txBody>
       </p:sp>
@@ -1427,7 +1347,7 @@
           <a:p>
             <a:fld id="{5BCAD085-E8A6-8845-BD4E-CB4CCA059FC4}" type="datetimeFigureOut">
               <a:rPr lang="en-US" smtClean="0"/>
-              <a:t>9/4/2026</a:t>
+              <a:t>1/27/13</a:t>
             </a:fld>
             <a:endParaRPr lang="en-US"/>
           </a:p>
@@ -1525,9 +1445,10 @@
           </a:lstStyle>
           <a:p>
             <a:r>
-              <a:rPr lang="en-US"/>
+              <a:rPr lang="en-US" smtClean="0"/>
               <a:t>Click to edit Master title style</a:t>
             </a:r>
+            <a:endParaRPr lang="en-US"/>
           </a:p>
         </p:txBody>
       </p:sp>
@@ -1590,7 +1511,7 @@
           <a:p>
             <a:pPr lvl="0"/>
             <a:r>
-              <a:rPr lang="en-US"/>
+              <a:rPr lang="en-US" smtClean="0"/>
               <a:t>Click to edit Master text styles</a:t>
             </a:r>
           </a:p>
@@ -1646,37 +1567,38 @@
           <a:p>
             <a:pPr lvl="0"/>
             <a:r>
-              <a:rPr lang="en-US"/>
+              <a:rPr lang="en-US" smtClean="0"/>
               <a:t>Click to edit Master text styles</a:t>
             </a:r>
           </a:p>
           <a:p>
             <a:pPr lvl="1"/>
             <a:r>
-              <a:rPr lang="en-US"/>
+              <a:rPr lang="en-US" smtClean="0"/>
               <a:t>Second level</a:t>
             </a:r>
           </a:p>
           <a:p>
             <a:pPr lvl="2"/>
             <a:r>
-              <a:rPr lang="en-US"/>
+              <a:rPr lang="en-US" smtClean="0"/>
               <a:t>Third level</a:t>
             </a:r>
           </a:p>
           <a:p>
             <a:pPr lvl="3"/>
             <a:r>
-              <a:rPr lang="en-US"/>
+              <a:rPr lang="en-US" smtClean="0"/>
               <a:t>Fourth level</a:t>
             </a:r>
           </a:p>
           <a:p>
             <a:pPr lvl="4"/>
             <a:r>
-              <a:rPr lang="en-US"/>
+              <a:rPr lang="en-US" smtClean="0"/>
               <a:t>Fifth level</a:t>
             </a:r>
+            <a:endParaRPr lang="en-US"/>
           </a:p>
         </p:txBody>
       </p:sp>
@@ -1739,7 +1661,7 @@
           <a:p>
             <a:pPr lvl="0"/>
             <a:r>
-              <a:rPr lang="en-US"/>
+              <a:rPr lang="en-US" smtClean="0"/>
               <a:t>Click to edit Master text styles</a:t>
             </a:r>
           </a:p>
@@ -1795,37 +1717,38 @@
           <a:p>
             <a:pPr lvl="0"/>
             <a:r>
-              <a:rPr lang="en-US"/>
+              <a:rPr lang="en-US" smtClean="0"/>
               <a:t>Click to edit Master text styles</a:t>
             </a:r>
           </a:p>
           <a:p>
             <a:pPr lvl="1"/>
             <a:r>
-              <a:rPr lang="en-US"/>
+              <a:rPr lang="en-US" smtClean="0"/>
               <a:t>Second level</a:t>
             </a:r>
           </a:p>
           <a:p>
             <a:pPr lvl="2"/>
             <a:r>
-              <a:rPr lang="en-US"/>
+              <a:rPr lang="en-US" smtClean="0"/>
               <a:t>Third level</a:t>
             </a:r>
           </a:p>
           <a:p>
             <a:pPr lvl="3"/>
             <a:r>
-              <a:rPr lang="en-US"/>
+              <a:rPr lang="en-US" smtClean="0"/>
               <a:t>Fourth level</a:t>
             </a:r>
           </a:p>
           <a:p>
             <a:pPr lvl="4"/>
             <a:r>
-              <a:rPr lang="en-US"/>
+              <a:rPr lang="en-US" smtClean="0"/>
               <a:t>Fifth level</a:t>
             </a:r>
+            <a:endParaRPr lang="en-US"/>
           </a:p>
         </p:txBody>
       </p:sp>
@@ -1846,7 +1769,7 @@
           <a:p>
             <a:fld id="{5BCAD085-E8A6-8845-BD4E-CB4CCA059FC4}" type="datetimeFigureOut">
               <a:rPr lang="en-US" smtClean="0"/>
-              <a:t>9/4/2026</a:t>
+              <a:t>1/27/13</a:t>
             </a:fld>
             <a:endParaRPr lang="en-US"/>
           </a:p>
@@ -1940,9 +1863,10 @@
           <a:lstStyle/>
           <a:p>
             <a:r>
-              <a:rPr lang="en-US"/>
+              <a:rPr lang="en-US" smtClean="0"/>
               <a:t>Click to edit Master title style</a:t>
             </a:r>
+            <a:endParaRPr lang="en-US"/>
           </a:p>
         </p:txBody>
       </p:sp>
@@ -1963,7 +1887,7 @@
           <a:p>
             <a:fld id="{5BCAD085-E8A6-8845-BD4E-CB4CCA059FC4}" type="datetimeFigureOut">
               <a:rPr lang="en-US" smtClean="0"/>
-              <a:t>9/4/2026</a:t>
+              <a:t>1/27/13</a:t>
             </a:fld>
             <a:endParaRPr lang="en-US"/>
           </a:p>
@@ -2058,7 +1982,7 @@
           <a:p>
             <a:fld id="{5BCAD085-E8A6-8845-BD4E-CB4CCA059FC4}" type="datetimeFigureOut">
               <a:rPr lang="en-US" smtClean="0"/>
-              <a:t>9/4/2026</a:t>
+              <a:t>1/27/13</a:t>
             </a:fld>
             <a:endParaRPr lang="en-US"/>
           </a:p>
@@ -2161,9 +2085,10 @@
           </a:lstStyle>
           <a:p>
             <a:r>
-              <a:rPr lang="en-US"/>
+              <a:rPr lang="en-US" smtClean="0"/>
               <a:t>Click to edit Master title style</a:t>
             </a:r>
+            <a:endParaRPr lang="en-US"/>
           </a:p>
         </p:txBody>
       </p:sp>
@@ -2217,37 +2142,38 @@
           <a:p>
             <a:pPr lvl="0"/>
             <a:r>
-              <a:rPr lang="en-US"/>
+              <a:rPr lang="en-US" smtClean="0"/>
               <a:t>Click to edit Master text styles</a:t>
             </a:r>
           </a:p>
           <a:p>
             <a:pPr lvl="1"/>
             <a:r>
-              <a:rPr lang="en-US"/>
+              <a:rPr lang="en-US" smtClean="0"/>
               <a:t>Second level</a:t>
             </a:r>
           </a:p>
           <a:p>
             <a:pPr lvl="2"/>
             <a:r>
-              <a:rPr lang="en-US"/>
+              <a:rPr lang="en-US" smtClean="0"/>
               <a:t>Third level</a:t>
             </a:r>
           </a:p>
           <a:p>
             <a:pPr lvl="3"/>
             <a:r>
-              <a:rPr lang="en-US"/>
+              <a:rPr lang="en-US" smtClean="0"/>
               <a:t>Fourth level</a:t>
             </a:r>
           </a:p>
           <a:p>
             <a:pPr lvl="4"/>
             <a:r>
-              <a:rPr lang="en-US"/>
+              <a:rPr lang="en-US" smtClean="0"/>
               <a:t>Fifth level</a:t>
             </a:r>
+            <a:endParaRPr lang="en-US"/>
           </a:p>
         </p:txBody>
       </p:sp>
@@ -2310,7 +2236,7 @@
           <a:p>
             <a:pPr lvl="0"/>
             <a:r>
-              <a:rPr lang="en-US"/>
+              <a:rPr lang="en-US" smtClean="0"/>
               <a:t>Click to edit Master text styles</a:t>
             </a:r>
           </a:p>
@@ -2333,7 +2259,7 @@
           <a:p>
             <a:fld id="{5BCAD085-E8A6-8845-BD4E-CB4CCA059FC4}" type="datetimeFigureOut">
               <a:rPr lang="en-US" smtClean="0"/>
-              <a:t>9/4/2026</a:t>
+              <a:t>1/27/13</a:t>
             </a:fld>
             <a:endParaRPr lang="en-US"/>
           </a:p>
@@ -2436,9 +2362,10 @@
           </a:lstStyle>
           <a:p>
             <a:r>
-              <a:rPr lang="en-US"/>
+              <a:rPr lang="en-US" smtClean="0"/>
               <a:t>Click to edit Master title style</a:t>
             </a:r>
+            <a:endParaRPr lang="en-US"/>
           </a:p>
         </p:txBody>
       </p:sp>
@@ -2562,7 +2489,7 @@
           <a:p>
             <a:pPr lvl="0"/>
             <a:r>
-              <a:rPr lang="en-US"/>
+              <a:rPr lang="en-US" smtClean="0"/>
               <a:t>Click to edit Master text styles</a:t>
             </a:r>
           </a:p>
@@ -2585,7 +2512,7 @@
           <a:p>
             <a:fld id="{5BCAD085-E8A6-8845-BD4E-CB4CCA059FC4}" type="datetimeFigureOut">
               <a:rPr lang="en-US" smtClean="0"/>
-              <a:t>9/4/2026</a:t>
+              <a:t>1/27/13</a:t>
             </a:fld>
             <a:endParaRPr lang="en-US"/>
           </a:p>
@@ -2694,9 +2621,10 @@
           <a:lstStyle/>
           <a:p>
             <a:r>
-              <a:rPr lang="en-US"/>
+              <a:rPr lang="en-US" smtClean="0"/>
               <a:t>Click to edit Master title style</a:t>
             </a:r>
+            <a:endParaRPr lang="en-US"/>
           </a:p>
         </p:txBody>
       </p:sp>
@@ -2727,37 +2655,38 @@
           <a:p>
             <a:pPr lvl="0"/>
             <a:r>
-              <a:rPr lang="en-US"/>
+              <a:rPr lang="en-US" smtClean="0"/>
               <a:t>Click to edit Master text styles</a:t>
             </a:r>
           </a:p>
           <a:p>
             <a:pPr lvl="1"/>
             <a:r>
-              <a:rPr lang="en-US"/>
+              <a:rPr lang="en-US" smtClean="0"/>
               <a:t>Second level</a:t>
             </a:r>
           </a:p>
           <a:p>
             <a:pPr lvl="2"/>
             <a:r>
-              <a:rPr lang="en-US"/>
+              <a:rPr lang="en-US" smtClean="0"/>
               <a:t>Third level</a:t>
             </a:r>
           </a:p>
           <a:p>
             <a:pPr lvl="3"/>
             <a:r>
-              <a:rPr lang="en-US"/>
+              <a:rPr lang="en-US" smtClean="0"/>
               <a:t>Fourth level</a:t>
             </a:r>
           </a:p>
           <a:p>
             <a:pPr lvl="4"/>
             <a:r>
-              <a:rPr lang="en-US"/>
+              <a:rPr lang="en-US" smtClean="0"/>
               <a:t>Fifth level</a:t>
             </a:r>
+            <a:endParaRPr lang="en-US"/>
           </a:p>
         </p:txBody>
       </p:sp>
@@ -2796,7 +2725,7 @@
           <a:p>
             <a:fld id="{5BCAD085-E8A6-8845-BD4E-CB4CCA059FC4}" type="datetimeFigureOut">
               <a:rPr lang="en-US" smtClean="0"/>
-              <a:t>9/4/2026</a:t>
+              <a:t>1/27/13</a:t>
             </a:fld>
             <a:endParaRPr lang="en-US"/>
           </a:p>
@@ -3155,7 +3084,7 @@
 </file>
 
 <file path=ppt/slides/slide1.xml><?xml version="1.0" encoding="utf-8"?>
-<p:sld xmlns:a="http://schemas.openxmlformats.org/drawingml/2006/main" xmlns:r="http://schemas.openxmlformats.org/officeDocument/2006/relationships" xmlns:p="http://schemas.openxmlformats.org/presentationml/2006/main">
+<p:sld xmlns:a="http://schemas.openxmlformats.org/drawingml/2006/main" xmlns:p="http://schemas.openxmlformats.org/presentationml/2006/main" xmlns:r="http://schemas.openxmlformats.org/officeDocument/2006/relationships">
   <p:cSld>
     <p:spTree>
       <p:nvGrpSpPr>
@@ -3163,14 +3092,7 @@
         <p:cNvGrpSpPr/>
         <p:nvPr/>
       </p:nvGrpSpPr>
-      <p:grpSpPr>
-        <a:xfrm>
-          <a:off x="0" y="0"/>
-          <a:ext cx="0" cy="0"/>
-          <a:chOff x="0" y="0"/>
-          <a:chExt cx="0" cy="0"/>
-        </a:xfrm>
-      </p:grpSpPr>
+      <p:grpSpPr/>
       <p:pic>
         <p:nvPicPr>
           <p:cNvPr id="2" name="Picture 1" descr="sih_slide1_bg.png"/>
@@ -3204,7 +3126,7 @@
         <p:spPr>
           <a:xfrm>
             <a:off x="731520" y="685800"/>
-            <a:ext cx="8046720" cy="938719"/>
+            <a:ext cx="8046720" cy="1188720"/>
           </a:xfrm>
           <a:prstGeom prst="rect">
             <a:avLst/>
@@ -3218,49 +3140,38 @@
           <a:lstStyle/>
           <a:p>
             <a:pPr>
-              <a:defRPr sz="2400" b="1">
+              <a:defRPr b="1" sz="2400">
                 <a:solidFill>
                   <a:srgbClr val="1B365D"/>
                 </a:solidFill>
               </a:defRPr>
             </a:pPr>
             <a:r>
-              <a:rPr dirty="0"/>
               <a:t>SMART INDIA HACKATHON 2026</a:t>
             </a:r>
           </a:p>
           <a:p>
             <a:pPr>
-              <a:defRPr sz="1800" b="1">
+              <a:defRPr b="1" sz="1800">
                 <a:solidFill>
                   <a:srgbClr val="1E293B"/>
                 </a:solidFill>
               </a:defRPr>
             </a:pPr>
             <a:r>
-              <a:rPr dirty="0"/>
               <a:t>AI-Based Early Warning &amp; Landslide Monitoring System</a:t>
             </a:r>
           </a:p>
           <a:p>
             <a:pPr>
-              <a:defRPr sz="1300" b="1">
+              <a:defRPr b="1" sz="1300">
                 <a:solidFill>
                   <a:srgbClr val="E65100"/>
                 </a:solidFill>
               </a:defRPr>
             </a:pPr>
             <a:r>
-              <a:rPr dirty="0"/>
-              <a:t>for North Eastern Region (</a:t>
-            </a:r>
-            <a:r>
-              <a:rPr lang="en-IN" dirty="0" err="1"/>
-              <a:t>MDo</a:t>
-            </a:r>
-            <a:r>
-              <a:rPr dirty="0"/>
-              <a:t>NER) of India</a:t>
+              <a:t>for North Eastern Region (NER) of India</a:t>
             </a:r>
           </a:p>
         </p:txBody>
@@ -3303,11 +3214,11 @@
           </a:fontRef>
         </p:style>
         <p:txBody>
-          <a:bodyPr wrap="square" lIns="182880" tIns="109728" rtlCol="0" anchor="ctr"/>
+          <a:bodyPr rtlCol="0" anchor="ctr" wrap="square" lIns="182880" tIns="109728"/>
           <a:lstStyle/>
           <a:p>
             <a:pPr algn="ctr">
-              <a:defRPr sz="1000" b="1">
+              <a:defRPr b="1" sz="1000">
                 <a:solidFill>
                   <a:srgbClr val="1B365D"/>
                 </a:solidFill>
@@ -3317,7 +3228,7 @@
               <a:t>•  Problem Statement ID - </a:t>
             </a:r>
             <a:r>
-              <a:rPr sz="1000" b="1">
+              <a:rPr b="1" sz="1000">
                 <a:solidFill>
                   <a:srgbClr val="1E293B"/>
                 </a:solidFill>
@@ -3327,7 +3238,7 @@
           </a:p>
           <a:p>
             <a:pPr>
-              <a:defRPr sz="1000" b="1">
+              <a:defRPr b="1" sz="1000">
                 <a:solidFill>
                   <a:srgbClr val="1B365D"/>
                 </a:solidFill>
@@ -3337,7 +3248,7 @@
               <a:t>•  Problem Statement Title - </a:t>
             </a:r>
             <a:r>
-              <a:rPr sz="1000" b="0">
+              <a:rPr b="0" sz="1000">
                 <a:solidFill>
                   <a:srgbClr val="1E293B"/>
                 </a:solidFill>
@@ -3347,7 +3258,7 @@
           </a:p>
           <a:p>
             <a:pPr>
-              <a:defRPr sz="1000" b="1">
+              <a:defRPr b="1" sz="1000">
                 <a:solidFill>
                   <a:srgbClr val="1B365D"/>
                 </a:solidFill>
@@ -3357,7 +3268,7 @@
               <a:t>•  Theme - </a:t>
             </a:r>
             <a:r>
-              <a:rPr sz="1000" b="0">
+              <a:rPr b="0" sz="1000">
                 <a:solidFill>
                   <a:srgbClr val="1E293B"/>
                 </a:solidFill>
@@ -3367,7 +3278,7 @@
           </a:p>
           <a:p>
             <a:pPr>
-              <a:defRPr sz="1000" b="1">
+              <a:defRPr b="1" sz="1000">
                 <a:solidFill>
                   <a:srgbClr val="1B365D"/>
                 </a:solidFill>
@@ -3377,7 +3288,7 @@
               <a:t>•  PS Category - </a:t>
             </a:r>
             <a:r>
-              <a:rPr sz="1000" b="0">
+              <a:rPr b="0" sz="1000">
                 <a:solidFill>
                   <a:srgbClr val="1E293B"/>
                 </a:solidFill>
@@ -3387,7 +3298,7 @@
           </a:p>
           <a:p>
             <a:pPr>
-              <a:defRPr sz="1000" b="1">
+              <a:defRPr b="1" sz="1000">
                 <a:solidFill>
                   <a:srgbClr val="1B365D"/>
                 </a:solidFill>
@@ -3397,7 +3308,7 @@
               <a:t>•  Organization - </a:t>
             </a:r>
             <a:r>
-              <a:rPr sz="1000" b="0">
+              <a:rPr b="0" sz="1000">
                 <a:solidFill>
                   <a:srgbClr val="1E293B"/>
                 </a:solidFill>
@@ -3407,7 +3318,7 @@
           </a:p>
           <a:p>
             <a:pPr>
-              <a:defRPr sz="1000" b="1">
+              <a:defRPr b="1" sz="1000">
                 <a:solidFill>
                   <a:srgbClr val="1B365D"/>
                 </a:solidFill>
@@ -3417,7 +3328,7 @@
               <a:t>•  Team Name - </a:t>
             </a:r>
             <a:r>
-              <a:rPr sz="1000" b="1">
+              <a:rPr b="1" sz="1000">
                 <a:solidFill>
                   <a:srgbClr val="E65100"/>
                 </a:solidFill>
@@ -3427,7 +3338,7 @@
           </a:p>
           <a:p>
             <a:pPr>
-              <a:defRPr sz="1000" b="1">
+              <a:defRPr b="1" sz="1000">
                 <a:solidFill>
                   <a:srgbClr val="1B365D"/>
                 </a:solidFill>
@@ -3437,7 +3348,7 @@
               <a:t>•  Team Leader - </a:t>
             </a:r>
             <a:r>
-              <a:rPr sz="1000" b="1">
+              <a:rPr b="1" sz="1000">
                 <a:solidFill>
                   <a:srgbClr val="E65100"/>
                 </a:solidFill>
@@ -3485,43 +3396,33 @@
           </a:fontRef>
         </p:style>
         <p:txBody>
-          <a:bodyPr wrap="square" lIns="182880" tIns="91440" rtlCol="0" anchor="ctr"/>
+          <a:bodyPr rtlCol="0" anchor="ctr" wrap="square" lIns="182880" tIns="91440"/>
           <a:lstStyle/>
           <a:p>
             <a:pPr algn="ctr">
-              <a:defRPr sz="1050" b="1">
+              <a:defRPr b="1" sz="1050">
                 <a:solidFill>
                   <a:srgbClr val="E65100"/>
                 </a:solidFill>
               </a:defRPr>
             </a:pPr>
             <a:r>
-              <a:rPr dirty="0"/>
-              <a:t>TEAM ALERT</a:t>
-            </a:r>
-            <a:r>
-              <a:rPr lang="en-IN" dirty="0"/>
-              <a:t>NEX</a:t>
-            </a:r>
-            <a:r>
-              <a:rPr dirty="0"/>
-              <a:t> ROSTER (ALL 6 MEMBERS)</a:t>
-            </a:r>
-          </a:p>
-          <a:p>
-            <a:pPr>
-              <a:defRPr sz="880" b="1">
+              <a:t>TEAM ALERTSPEC ROSTER (ALL 6 MEMBERS)</a:t>
+            </a:r>
+          </a:p>
+          <a:p>
+            <a:pPr>
+              <a:defRPr b="1" sz="880">
                 <a:solidFill>
                   <a:srgbClr val="E65100"/>
                 </a:solidFill>
               </a:defRPr>
             </a:pPr>
             <a:r>
-              <a:rPr dirty="0"/>
               <a:t>1. Ayush Kumar  [Team Leader]: </a:t>
             </a:r>
             <a:r>
-              <a:rPr sz="850" dirty="0">
+              <a:rPr sz="850">
                 <a:solidFill>
                   <a:srgbClr val="1E293B"/>
                 </a:solidFill>
@@ -3531,18 +3432,17 @@
           </a:p>
           <a:p>
             <a:pPr>
-              <a:defRPr sz="880" b="1">
+              <a:defRPr b="1" sz="880">
                 <a:solidFill>
                   <a:srgbClr val="1B365D"/>
                 </a:solidFill>
               </a:defRPr>
             </a:pPr>
             <a:r>
-              <a:rPr dirty="0"/>
               <a:t>2. Prerana Mondal  [Member]: </a:t>
             </a:r>
             <a:r>
-              <a:rPr sz="850" dirty="0">
+              <a:rPr sz="850">
                 <a:solidFill>
                   <a:srgbClr val="1E293B"/>
                 </a:solidFill>
@@ -3552,26 +3452,17 @@
           </a:p>
           <a:p>
             <a:pPr>
-              <a:defRPr sz="880" b="1">
+              <a:defRPr b="1" sz="880">
                 <a:solidFill>
                   <a:srgbClr val="1B365D"/>
                 </a:solidFill>
               </a:defRPr>
             </a:pPr>
             <a:r>
-              <a:rPr dirty="0"/>
-              <a:t>3. </a:t>
-            </a:r>
-            <a:r>
-              <a:rPr dirty="0" err="1"/>
-              <a:t>Sondeep</a:t>
-            </a:r>
-            <a:r>
-              <a:rPr dirty="0"/>
-              <a:t> Kumar  [Member]: </a:t>
-            </a:r>
-            <a:r>
-              <a:rPr sz="850" dirty="0">
+              <a:t>3. Sondeep Kumar  [Member]: </a:t>
+            </a:r>
+            <a:r>
+              <a:rPr sz="850">
                 <a:solidFill>
                   <a:srgbClr val="1E293B"/>
                 </a:solidFill>
@@ -3581,18 +3472,17 @@
           </a:p>
           <a:p>
             <a:pPr>
-              <a:defRPr sz="880" b="1">
+              <a:defRPr b="1" sz="880">
                 <a:solidFill>
                   <a:srgbClr val="1B365D"/>
                 </a:solidFill>
               </a:defRPr>
             </a:pPr>
             <a:r>
-              <a:rPr dirty="0"/>
               <a:t>4. Shinjini Lohar  [Member]: </a:t>
             </a:r>
             <a:r>
-              <a:rPr sz="850" dirty="0">
+              <a:rPr sz="850">
                 <a:solidFill>
                   <a:srgbClr val="1E293B"/>
                 </a:solidFill>
@@ -3602,18 +3492,17 @@
           </a:p>
           <a:p>
             <a:pPr>
-              <a:defRPr sz="880" b="1">
+              <a:defRPr b="1" sz="880">
                 <a:solidFill>
                   <a:srgbClr val="1B365D"/>
                 </a:solidFill>
               </a:defRPr>
             </a:pPr>
             <a:r>
-              <a:rPr dirty="0"/>
               <a:t>5. Subham Kumar Modi  [Member]: </a:t>
             </a:r>
             <a:r>
-              <a:rPr sz="850" dirty="0">
+              <a:rPr sz="850">
                 <a:solidFill>
                   <a:srgbClr val="1E293B"/>
                 </a:solidFill>
@@ -3623,18 +3512,17 @@
           </a:p>
           <a:p>
             <a:pPr>
-              <a:defRPr sz="880" b="1">
+              <a:defRPr b="1" sz="880">
                 <a:solidFill>
                   <a:srgbClr val="1B365D"/>
                 </a:solidFill>
               </a:defRPr>
             </a:pPr>
             <a:r>
-              <a:rPr dirty="0"/>
               <a:t>6. Rahul Deo  [Member]: </a:t>
             </a:r>
             <a:r>
-              <a:rPr sz="850" dirty="0">
+              <a:rPr sz="850">
                 <a:solidFill>
                   <a:srgbClr val="1E293B"/>
                 </a:solidFill>
@@ -3702,7 +3590,7 @@
           <a:lstStyle/>
           <a:p>
             <a:pPr algn="r">
-              <a:defRPr sz="950" b="1">
+              <a:defRPr b="1" sz="950">
                 <a:solidFill>
                   <a:srgbClr val="1B365D"/>
                 </a:solidFill>
@@ -3723,7 +3611,7 @@
 </file>
 
 <file path=ppt/slides/slide2.xml><?xml version="1.0" encoding="utf-8"?>
-<p:sld xmlns:a="http://schemas.openxmlformats.org/drawingml/2006/main" xmlns:r="http://schemas.openxmlformats.org/officeDocument/2006/relationships" xmlns:p="http://schemas.openxmlformats.org/presentationml/2006/main">
+<p:sld xmlns:a="http://schemas.openxmlformats.org/drawingml/2006/main" xmlns:p="http://schemas.openxmlformats.org/presentationml/2006/main" xmlns:r="http://schemas.openxmlformats.org/officeDocument/2006/relationships">
   <p:cSld>
     <p:spTree>
       <p:nvGrpSpPr>
@@ -3731,14 +3619,7 @@
         <p:cNvGrpSpPr/>
         <p:nvPr/>
       </p:nvGrpSpPr>
-      <p:grpSpPr>
-        <a:xfrm>
-          <a:off x="0" y="0"/>
-          <a:ext cx="0" cy="0"/>
-          <a:chOff x="0" y="0"/>
-          <a:chExt cx="0" cy="0"/>
-        </a:xfrm>
-      </p:grpSpPr>
+      <p:grpSpPr/>
       <p:pic>
         <p:nvPicPr>
           <p:cNvPr id="2" name="Picture 1" descr="sih_content_bg.png"/>
@@ -3786,7 +3667,7 @@
           <a:lstStyle/>
           <a:p>
             <a:pPr>
-              <a:defRPr sz="1100" b="1">
+              <a:defRPr b="1" sz="1100">
                 <a:solidFill>
                   <a:srgbClr val="E65100"/>
                 </a:solidFill>
@@ -3821,7 +3702,7 @@
           <a:lstStyle/>
           <a:p>
             <a:pPr algn="r">
-              <a:defRPr sz="1000" b="1">
+              <a:defRPr b="1" sz="1000">
                 <a:solidFill>
                   <a:srgbClr val="1B365D"/>
                 </a:solidFill>
@@ -3856,7 +3737,7 @@
           <a:lstStyle/>
           <a:p>
             <a:pPr>
-              <a:defRPr sz="2100" b="1">
+              <a:defRPr b="1" sz="2100">
                 <a:solidFill>
                   <a:srgbClr val="1B365D"/>
                 </a:solidFill>
@@ -3926,7 +3807,7 @@
           <a:lstStyle/>
           <a:p>
             <a:pPr algn="r">
-              <a:defRPr sz="950" b="1">
+              <a:defRPr b="1" sz="950">
                 <a:solidFill>
                   <a:srgbClr val="1B365D"/>
                 </a:solidFill>
@@ -3976,11 +3857,11 @@
           </a:fontRef>
         </p:style>
         <p:txBody>
-          <a:bodyPr lIns="182880" rtlCol="0" anchor="ctr"/>
+          <a:bodyPr rtlCol="0" anchor="ctr" lIns="182880"/>
           <a:lstStyle/>
           <a:p>
             <a:pPr algn="ctr">
-              <a:defRPr sz="1000" b="1">
+              <a:defRPr b="1" sz="1000">
                 <a:solidFill>
                   <a:srgbClr val="EF4444"/>
                 </a:solidFill>
@@ -4038,11 +3919,11 @@
           </a:fontRef>
         </p:style>
         <p:txBody>
-          <a:bodyPr wrap="square" lIns="164592" tIns="137160" rtlCol="0" anchor="ctr"/>
+          <a:bodyPr rtlCol="0" anchor="ctr" wrap="square" lIns="164592" tIns="137160"/>
           <a:lstStyle/>
           <a:p>
             <a:pPr algn="ctr">
-              <a:defRPr sz="1100" b="1">
+              <a:defRPr b="1" sz="1100">
                 <a:solidFill>
                   <a:srgbClr val="EF4444"/>
                 </a:solidFill>
@@ -4104,11 +3985,11 @@
           </a:fontRef>
         </p:style>
         <p:txBody>
-          <a:bodyPr wrap="square" lIns="164592" tIns="137160" rtlCol="0" anchor="ctr"/>
+          <a:bodyPr rtlCol="0" anchor="ctr" wrap="square" lIns="164592" tIns="137160"/>
           <a:lstStyle/>
           <a:p>
             <a:pPr algn="ctr">
-              <a:defRPr sz="1100" b="1">
+              <a:defRPr b="1" sz="1100">
                 <a:solidFill>
                   <a:srgbClr val="F97316"/>
                 </a:solidFill>
@@ -4170,11 +4051,11 @@
           </a:fontRef>
         </p:style>
         <p:txBody>
-          <a:bodyPr wrap="square" lIns="164592" tIns="137160" rtlCol="0" anchor="ctr"/>
+          <a:bodyPr rtlCol="0" anchor="ctr" wrap="square" lIns="164592" tIns="137160"/>
           <a:lstStyle/>
           <a:p>
             <a:pPr algn="ctr">
-              <a:defRPr sz="1100" b="1">
+              <a:defRPr b="1" sz="1100">
                 <a:solidFill>
                   <a:srgbClr val="F59E0B"/>
                 </a:solidFill>
@@ -4236,11 +4117,11 @@
           </a:fontRef>
         </p:style>
         <p:txBody>
-          <a:bodyPr wrap="square" lIns="164592" tIns="137160" rtlCol="0" anchor="ctr"/>
+          <a:bodyPr rtlCol="0" anchor="ctr" wrap="square" lIns="164592" tIns="137160"/>
           <a:lstStyle/>
           <a:p>
             <a:pPr algn="ctr">
-              <a:defRPr sz="1100" b="1">
+              <a:defRPr b="1" sz="1100">
                 <a:solidFill>
                   <a:srgbClr val="1B365D"/>
                 </a:solidFill>
@@ -4272,8 +4153,8 @@
         </p:nvSpPr>
         <p:spPr>
           <a:xfrm>
-            <a:off x="676612" y="4004674"/>
-            <a:ext cx="10728655" cy="576072"/>
+            <a:off x="731520" y="4114800"/>
+            <a:ext cx="10728655" cy="2148840"/>
           </a:xfrm>
           <a:prstGeom prst="roundRect">
             <a:avLst/>
@@ -4302,18 +4183,17 @@
           </a:fontRef>
         </p:style>
         <p:txBody>
-          <a:bodyPr wrap="square" lIns="182880" tIns="109728" rtlCol="0" anchor="ctr"/>
+          <a:bodyPr rtlCol="0" anchor="ctr" wrap="square" lIns="182880" tIns="109728"/>
           <a:lstStyle/>
           <a:p>
             <a:pPr algn="ctr">
-              <a:defRPr sz="1150" b="1">
+              <a:defRPr b="1" sz="1150">
                 <a:solidFill>
                   <a:srgbClr val="1B365D"/>
                 </a:solidFill>
               </a:defRPr>
             </a:pPr>
             <a:r>
-              <a:rPr dirty="0"/>
               <a:t>VISUAL PARADIGM SHIFT: REACTIVE TO PROACTIVE</a:t>
             </a:r>
           </a:p>
@@ -4327,7 +4207,7 @@
         </p:nvSpPr>
         <p:spPr>
           <a:xfrm>
-            <a:off x="1005840" y="4644264"/>
+            <a:off x="1005840" y="4526280"/>
             <a:ext cx="4846320" cy="1554480"/>
           </a:xfrm>
           <a:prstGeom prst="roundRect">
@@ -4357,11 +4237,11 @@
           </a:fontRef>
         </p:style>
         <p:txBody>
-          <a:bodyPr wrap="square" lIns="137160" tIns="109728" rtlCol="0" anchor="ctr"/>
+          <a:bodyPr rtlCol="0" anchor="ctr" wrap="square" lIns="137160" tIns="109728"/>
           <a:lstStyle/>
           <a:p>
             <a:pPr algn="ctr">
-              <a:defRPr sz="1100" b="1">
+              <a:defRPr b="1" sz="1100">
                 <a:solidFill>
                   <a:srgbClr val="EF4444"/>
                 </a:solidFill>
@@ -4373,7 +4253,7 @@
           </a:p>
           <a:p>
             <a:pPr>
-              <a:defRPr sz="1000" b="1">
+              <a:defRPr b="1" sz="1000">
                 <a:solidFill>
                   <a:srgbClr val="1B365D"/>
                 </a:solidFill>
@@ -4405,7 +4285,7 @@
         </p:nvSpPr>
         <p:spPr>
           <a:xfrm>
-            <a:off x="6217920" y="4654097"/>
+            <a:off x="6217920" y="4526280"/>
             <a:ext cx="4937760" cy="1554480"/>
           </a:xfrm>
           <a:prstGeom prst="roundRect">
@@ -4435,31 +4315,29 @@
           </a:fontRef>
         </p:style>
         <p:txBody>
-          <a:bodyPr wrap="square" lIns="137160" tIns="109728" rtlCol="0" anchor="ctr"/>
+          <a:bodyPr rtlCol="0" anchor="ctr" wrap="square" lIns="137160" tIns="109728"/>
           <a:lstStyle/>
           <a:p>
             <a:pPr algn="ctr">
-              <a:defRPr sz="1100" b="1">
+              <a:defRPr b="1" sz="1100">
                 <a:solidFill>
                   <a:srgbClr val="008A4B"/>
                 </a:solidFill>
               </a:defRPr>
             </a:pPr>
             <a:r>
-              <a:rPr dirty="0"/>
               <a:t>OUR APPROACH (TEAM ALERTNEX PROACTIVE)</a:t>
             </a:r>
           </a:p>
           <a:p>
             <a:pPr>
-              <a:defRPr sz="1000" b="1">
+              <a:defRPr b="1" sz="1000">
                 <a:solidFill>
                   <a:srgbClr val="1B365D"/>
                 </a:solidFill>
               </a:defRPr>
             </a:pPr>
             <a:r>
-              <a:rPr dirty="0"/>
               <a:t>Monitoring  ➔  Early Warning  ➔  Preparation  ➔  Faster Response</a:t>
             </a:r>
           </a:p>
@@ -4472,7 +4350,6 @@
               </a:defRPr>
             </a:pPr>
             <a:r>
-              <a:rPr dirty="0"/>
               <a:t>• 6-12h pre-warning  |  Automated road blockage detection  |  Bypass routes active before collapse</a:t>
             </a:r>
           </a:p>
@@ -4487,7 +4364,7 @@
 </file>
 
 <file path=ppt/slides/slide3.xml><?xml version="1.0" encoding="utf-8"?>
-<p:sld xmlns:a="http://schemas.openxmlformats.org/drawingml/2006/main" xmlns:r="http://schemas.openxmlformats.org/officeDocument/2006/relationships" xmlns:p="http://schemas.openxmlformats.org/presentationml/2006/main">
+<p:sld xmlns:a="http://schemas.openxmlformats.org/drawingml/2006/main" xmlns:p="http://schemas.openxmlformats.org/presentationml/2006/main" xmlns:r="http://schemas.openxmlformats.org/officeDocument/2006/relationships">
   <p:cSld>
     <p:spTree>
       <p:nvGrpSpPr>
@@ -4495,14 +4372,7 @@
         <p:cNvGrpSpPr/>
         <p:nvPr/>
       </p:nvGrpSpPr>
-      <p:grpSpPr>
-        <a:xfrm>
-          <a:off x="0" y="0"/>
-          <a:ext cx="0" cy="0"/>
-          <a:chOff x="0" y="0"/>
-          <a:chExt cx="0" cy="0"/>
-        </a:xfrm>
-      </p:grpSpPr>
+      <p:grpSpPr/>
       <p:pic>
         <p:nvPicPr>
           <p:cNvPr id="2" name="Picture 1" descr="sih_content_bg.png"/>
@@ -4550,7 +4420,7 @@
           <a:lstStyle/>
           <a:p>
             <a:pPr>
-              <a:defRPr sz="1100" b="1">
+              <a:defRPr b="1" sz="1100">
                 <a:solidFill>
                   <a:srgbClr val="E65100"/>
                 </a:solidFill>
@@ -4585,7 +4455,7 @@
           <a:lstStyle/>
           <a:p>
             <a:pPr algn="r">
-              <a:defRPr sz="1000" b="1">
+              <a:defRPr b="1" sz="1000">
                 <a:solidFill>
                   <a:srgbClr val="1B365D"/>
                 </a:solidFill>
@@ -4620,7 +4490,7 @@
           <a:lstStyle/>
           <a:p>
             <a:pPr>
-              <a:defRPr sz="2100" b="1">
+              <a:defRPr b="1" sz="2100">
                 <a:solidFill>
                   <a:srgbClr val="1B365D"/>
                 </a:solidFill>
@@ -4690,7 +4560,7 @@
           <a:lstStyle/>
           <a:p>
             <a:pPr algn="r">
-              <a:defRPr sz="950" b="1">
+              <a:defRPr b="1" sz="950">
                 <a:solidFill>
                   <a:srgbClr val="1B365D"/>
                 </a:solidFill>
@@ -4740,11 +4610,11 @@
           </a:fontRef>
         </p:style>
         <p:txBody>
-          <a:bodyPr wrap="square" lIns="182880" tIns="137160" rtlCol="0" anchor="ctr"/>
+          <a:bodyPr rtlCol="0" anchor="ctr" wrap="square" lIns="182880" tIns="137160"/>
           <a:lstStyle/>
           <a:p>
             <a:pPr algn="ctr">
-              <a:defRPr sz="1200" b="1">
+              <a:defRPr b="1" sz="1200">
                 <a:solidFill>
                   <a:srgbClr val="1B365D"/>
                 </a:solidFill>
@@ -4756,7 +4626,7 @@
           </a:p>
           <a:p>
             <a:pPr>
-              <a:defRPr sz="1019" b="1">
+              <a:defRPr b="1" sz="1019">
                 <a:solidFill>
                   <a:srgbClr val="E65100"/>
                 </a:solidFill>
@@ -4780,7 +4650,7 @@
           </a:p>
           <a:p>
             <a:pPr>
-              <a:defRPr sz="1019" b="1">
+              <a:defRPr b="1" sz="1019">
                 <a:solidFill>
                   <a:srgbClr val="1B365D"/>
                 </a:solidFill>
@@ -4804,7 +4674,7 @@
           </a:p>
           <a:p>
             <a:pPr>
-              <a:defRPr sz="1019" b="1">
+              <a:defRPr b="1" sz="1019">
                 <a:solidFill>
                   <a:srgbClr val="008A4B"/>
                 </a:solidFill>
@@ -4828,7 +4698,7 @@
           </a:p>
           <a:p>
             <a:pPr>
-              <a:defRPr sz="1019" b="1">
+              <a:defRPr b="1" sz="1019">
                 <a:solidFill>
                   <a:srgbClr val="EF4444"/>
                 </a:solidFill>
@@ -4890,11 +4760,11 @@
           </a:fontRef>
         </p:style>
         <p:txBody>
-          <a:bodyPr wrap="square" lIns="182880" tIns="137160" rtlCol="0" anchor="ctr"/>
+          <a:bodyPr rtlCol="0" anchor="ctr" wrap="square" lIns="182880" tIns="137160"/>
           <a:lstStyle/>
           <a:p>
             <a:pPr algn="ctr">
-              <a:defRPr sz="1200" b="1">
+              <a:defRPr b="1" sz="1200">
                 <a:solidFill>
                   <a:srgbClr val="1B365D"/>
                 </a:solidFill>
@@ -4906,7 +4776,7 @@
           </a:p>
           <a:p>
             <a:pPr>
-              <a:defRPr sz="1000" b="1">
+              <a:defRPr b="1" sz="1000">
                 <a:solidFill>
                   <a:srgbClr val="10B981"/>
                 </a:solidFill>
@@ -4930,7 +4800,7 @@
           </a:p>
           <a:p>
             <a:pPr>
-              <a:defRPr sz="1000" b="1">
+              <a:defRPr b="1" sz="1000">
                 <a:solidFill>
                   <a:srgbClr val="F59E0B"/>
                 </a:solidFill>
@@ -4954,7 +4824,7 @@
           </a:p>
           <a:p>
             <a:pPr>
-              <a:defRPr sz="1000" b="1">
+              <a:defRPr b="1" sz="1000">
                 <a:solidFill>
                   <a:srgbClr val="F97316"/>
                 </a:solidFill>
@@ -4978,7 +4848,7 @@
           </a:p>
           <a:p>
             <a:pPr>
-              <a:defRPr sz="1000" b="1">
+              <a:defRPr b="1" sz="1000">
                 <a:solidFill>
                   <a:srgbClr val="EF4444"/>
                 </a:solidFill>
@@ -5011,7 +4881,7 @@
 </file>
 
 <file path=ppt/slides/slide4.xml><?xml version="1.0" encoding="utf-8"?>
-<p:sld xmlns:a="http://schemas.openxmlformats.org/drawingml/2006/main" xmlns:r="http://schemas.openxmlformats.org/officeDocument/2006/relationships" xmlns:p="http://schemas.openxmlformats.org/presentationml/2006/main">
+<p:sld xmlns:a="http://schemas.openxmlformats.org/drawingml/2006/main" xmlns:p="http://schemas.openxmlformats.org/presentationml/2006/main" xmlns:r="http://schemas.openxmlformats.org/officeDocument/2006/relationships">
   <p:cSld>
     <p:spTree>
       <p:nvGrpSpPr>
@@ -5019,14 +4889,7 @@
         <p:cNvGrpSpPr/>
         <p:nvPr/>
       </p:nvGrpSpPr>
-      <p:grpSpPr>
-        <a:xfrm>
-          <a:off x="0" y="0"/>
-          <a:ext cx="0" cy="0"/>
-          <a:chOff x="0" y="0"/>
-          <a:chExt cx="0" cy="0"/>
-        </a:xfrm>
-      </p:grpSpPr>
+      <p:grpSpPr/>
       <p:pic>
         <p:nvPicPr>
           <p:cNvPr id="2" name="Picture 1" descr="sih_content_bg.png"/>
@@ -5074,7 +4937,7 @@
           <a:lstStyle/>
           <a:p>
             <a:pPr>
-              <a:defRPr sz="1100" b="1">
+              <a:defRPr b="1" sz="1100">
                 <a:solidFill>
                   <a:srgbClr val="E65100"/>
                 </a:solidFill>
@@ -5109,7 +4972,7 @@
           <a:lstStyle/>
           <a:p>
             <a:pPr algn="r">
-              <a:defRPr sz="1000" b="1">
+              <a:defRPr b="1" sz="1000">
                 <a:solidFill>
                   <a:srgbClr val="1B365D"/>
                 </a:solidFill>
@@ -5144,7 +5007,7 @@
           <a:lstStyle/>
           <a:p>
             <a:pPr>
-              <a:defRPr sz="2100" b="1">
+              <a:defRPr b="1" sz="2100">
                 <a:solidFill>
                   <a:srgbClr val="1B365D"/>
                 </a:solidFill>
@@ -5214,7 +5077,7 @@
           <a:lstStyle/>
           <a:p>
             <a:pPr algn="r">
-              <a:defRPr sz="950" b="1">
+              <a:defRPr b="1" sz="950">
                 <a:solidFill>
                   <a:srgbClr val="1B365D"/>
                 </a:solidFill>
@@ -5264,11 +5127,11 @@
           </a:fontRef>
         </p:style>
         <p:txBody>
-          <a:bodyPr wrap="square" lIns="182880" tIns="109728" rtlCol="0" anchor="ctr"/>
+          <a:bodyPr rtlCol="0" anchor="ctr" wrap="square" lIns="182880" tIns="109728"/>
           <a:lstStyle/>
           <a:p>
             <a:pPr algn="ctr">
-              <a:defRPr sz="1100" b="1">
+              <a:defRPr b="1" sz="1100">
                 <a:solidFill>
                   <a:srgbClr val="1B365D"/>
                 </a:solidFill>
@@ -5280,7 +5143,7 @@
           </a:p>
           <a:p>
             <a:pPr>
-              <a:defRPr sz="950" i="1">
+              <a:defRPr i="1" sz="950">
                 <a:solidFill>
                   <a:srgbClr val="1B365D"/>
                 </a:solidFill>
@@ -5366,11 +5229,11 @@
           </a:fontRef>
         </p:style>
         <p:txBody>
-          <a:bodyPr wrap="square" lIns="182880" tIns="109728" rtlCol="0" anchor="ctr"/>
+          <a:bodyPr rtlCol="0" anchor="ctr" wrap="square" lIns="182880" tIns="109728"/>
           <a:lstStyle/>
           <a:p>
             <a:pPr algn="ctr">
-              <a:defRPr sz="1100" b="1">
+              <a:defRPr b="1" sz="1100">
                 <a:solidFill>
                   <a:srgbClr val="E65100"/>
                 </a:solidFill>
@@ -5382,7 +5245,7 @@
           </a:p>
           <a:p>
             <a:pPr>
-              <a:defRPr sz="950" i="1">
+              <a:defRPr i="1" sz="950">
                 <a:solidFill>
                   <a:srgbClr val="1B365D"/>
                 </a:solidFill>
@@ -5480,11 +5343,11 @@
           </a:fontRef>
         </p:style>
         <p:txBody>
-          <a:bodyPr wrap="square" lIns="182880" tIns="109728" rtlCol="0" anchor="ctr"/>
+          <a:bodyPr rtlCol="0" anchor="ctr" wrap="square" lIns="182880" tIns="109728"/>
           <a:lstStyle/>
           <a:p>
             <a:pPr algn="ctr">
-              <a:defRPr sz="1100" b="1">
+              <a:defRPr b="1" sz="1100">
                 <a:solidFill>
                   <a:srgbClr val="008A4B"/>
                 </a:solidFill>
@@ -5496,7 +5359,7 @@
           </a:p>
           <a:p>
             <a:pPr>
-              <a:defRPr sz="950" i="1">
+              <a:defRPr i="1" sz="950">
                 <a:solidFill>
                   <a:srgbClr val="1B365D"/>
                 </a:solidFill>
@@ -5594,11 +5457,11 @@
           </a:fontRef>
         </p:style>
         <p:txBody>
-          <a:bodyPr wrap="square" lIns="182880" tIns="109728" rtlCol="0" anchor="ctr"/>
+          <a:bodyPr rtlCol="0" anchor="ctr" wrap="square" lIns="182880" tIns="109728"/>
           <a:lstStyle/>
           <a:p>
             <a:pPr algn="ctr">
-              <a:defRPr sz="1100" b="1">
+              <a:defRPr b="1" sz="1100">
                 <a:solidFill>
                   <a:srgbClr val="EF4444"/>
                 </a:solidFill>
@@ -5610,7 +5473,7 @@
           </a:p>
           <a:p>
             <a:pPr>
-              <a:defRPr sz="950" i="1">
+              <a:defRPr i="1" sz="950">
                 <a:solidFill>
                   <a:srgbClr val="1B365D"/>
                 </a:solidFill>
@@ -5703,7 +5566,7 @@
 </file>
 
 <file path=ppt/slides/slide5.xml><?xml version="1.0" encoding="utf-8"?>
-<p:sld xmlns:a="http://schemas.openxmlformats.org/drawingml/2006/main" xmlns:r="http://schemas.openxmlformats.org/officeDocument/2006/relationships" xmlns:p="http://schemas.openxmlformats.org/presentationml/2006/main">
+<p:sld xmlns:a="http://schemas.openxmlformats.org/drawingml/2006/main" xmlns:p="http://schemas.openxmlformats.org/presentationml/2006/main" xmlns:r="http://schemas.openxmlformats.org/officeDocument/2006/relationships">
   <p:cSld>
     <p:spTree>
       <p:nvGrpSpPr>
@@ -5711,14 +5574,7 @@
         <p:cNvGrpSpPr/>
         <p:nvPr/>
       </p:nvGrpSpPr>
-      <p:grpSpPr>
-        <a:xfrm>
-          <a:off x="0" y="0"/>
-          <a:ext cx="0" cy="0"/>
-          <a:chOff x="0" y="0"/>
-          <a:chExt cx="0" cy="0"/>
-        </a:xfrm>
-      </p:grpSpPr>
+      <p:grpSpPr/>
       <p:pic>
         <p:nvPicPr>
           <p:cNvPr id="2" name="Picture 1" descr="sih_content_bg.png"/>
@@ -5766,7 +5622,7 @@
           <a:lstStyle/>
           <a:p>
             <a:pPr>
-              <a:defRPr sz="1100" b="1">
+              <a:defRPr b="1" sz="1100">
                 <a:solidFill>
                   <a:srgbClr val="E65100"/>
                 </a:solidFill>
@@ -5801,7 +5657,7 @@
           <a:lstStyle/>
           <a:p>
             <a:pPr algn="r">
-              <a:defRPr sz="1000" b="1">
+              <a:defRPr b="1" sz="1000">
                 <a:solidFill>
                   <a:srgbClr val="1B365D"/>
                 </a:solidFill>
@@ -5836,7 +5692,7 @@
           <a:lstStyle/>
           <a:p>
             <a:pPr>
-              <a:defRPr sz="2100" b="1">
+              <a:defRPr b="1" sz="2100">
                 <a:solidFill>
                   <a:srgbClr val="1B365D"/>
                 </a:solidFill>
@@ -5906,7 +5762,7 @@
           <a:lstStyle/>
           <a:p>
             <a:pPr algn="r">
-              <a:defRPr sz="950" b="1">
+              <a:defRPr b="1" sz="950">
                 <a:solidFill>
                   <a:srgbClr val="1B365D"/>
                 </a:solidFill>
@@ -5956,11 +5812,11 @@
           </a:fontRef>
         </p:style>
         <p:txBody>
-          <a:bodyPr wrap="square" lIns="182880" tIns="91440" rtlCol="0" anchor="ctr"/>
+          <a:bodyPr rtlCol="0" anchor="ctr" wrap="square" lIns="182880" tIns="91440"/>
           <a:lstStyle/>
           <a:p>
             <a:pPr algn="ctr">
-              <a:defRPr sz="1100" b="1">
+              <a:defRPr b="1" sz="1100">
                 <a:solidFill>
                   <a:srgbClr val="E65100"/>
                 </a:solidFill>
@@ -6022,11 +5878,11 @@
           </a:fontRef>
         </p:style>
         <p:txBody>
-          <a:bodyPr wrap="square" lIns="182880" tIns="91440" rtlCol="0" anchor="ctr"/>
+          <a:bodyPr rtlCol="0" anchor="ctr" wrap="square" lIns="182880" tIns="91440"/>
           <a:lstStyle/>
           <a:p>
             <a:pPr algn="ctr">
-              <a:defRPr sz="1100" b="1">
+              <a:defRPr b="1" sz="1100">
                 <a:solidFill>
                   <a:srgbClr val="1B365D"/>
                 </a:solidFill>
@@ -6088,11 +5944,11 @@
           </a:fontRef>
         </p:style>
         <p:txBody>
-          <a:bodyPr wrap="square" lIns="182880" tIns="91440" rtlCol="0" anchor="ctr"/>
+          <a:bodyPr rtlCol="0" anchor="ctr" wrap="square" lIns="182880" tIns="91440"/>
           <a:lstStyle/>
           <a:p>
             <a:pPr algn="ctr">
-              <a:defRPr sz="1100" b="1">
+              <a:defRPr b="1" sz="1100">
                 <a:solidFill>
                   <a:srgbClr val="008A4B"/>
                 </a:solidFill>
@@ -6154,11 +6010,11 @@
           </a:fontRef>
         </p:style>
         <p:txBody>
-          <a:bodyPr wrap="square" lIns="182880" tIns="91440" rtlCol="0" anchor="ctr"/>
+          <a:bodyPr rtlCol="0" anchor="ctr" wrap="square" lIns="182880" tIns="91440"/>
           <a:lstStyle/>
           <a:p>
             <a:pPr algn="ctr">
-              <a:defRPr sz="1100" b="1">
+              <a:defRPr b="1" sz="1100">
                 <a:solidFill>
                   <a:srgbClr val="EF4444"/>
                 </a:solidFill>
@@ -6220,11 +6076,11 @@
           </a:fontRef>
         </p:style>
         <p:txBody>
-          <a:bodyPr wrap="square" lIns="182880" tIns="73152" rtlCol="0" anchor="ctr"/>
+          <a:bodyPr rtlCol="0" anchor="ctr" wrap="square" lIns="182880" tIns="73152"/>
           <a:lstStyle/>
           <a:p>
             <a:pPr algn="ctr">
-              <a:defRPr sz="1000" b="1">
+              <a:defRPr b="1" sz="1000">
                 <a:solidFill>
                   <a:srgbClr val="64FFDA"/>
                 </a:solidFill>
@@ -6257,7 +6113,7 @@
 </file>
 
 <file path=ppt/slides/slide6.xml><?xml version="1.0" encoding="utf-8"?>
-<p:sld xmlns:a="http://schemas.openxmlformats.org/drawingml/2006/main" xmlns:r="http://schemas.openxmlformats.org/officeDocument/2006/relationships" xmlns:p="http://schemas.openxmlformats.org/presentationml/2006/main">
+<p:sld xmlns:a="http://schemas.openxmlformats.org/drawingml/2006/main" xmlns:p="http://schemas.openxmlformats.org/presentationml/2006/main" xmlns:r="http://schemas.openxmlformats.org/officeDocument/2006/relationships">
   <p:cSld>
     <p:spTree>
       <p:nvGrpSpPr>
@@ -6265,14 +6121,7 @@
         <p:cNvGrpSpPr/>
         <p:nvPr/>
       </p:nvGrpSpPr>
-      <p:grpSpPr>
-        <a:xfrm>
-          <a:off x="0" y="0"/>
-          <a:ext cx="0" cy="0"/>
-          <a:chOff x="0" y="0"/>
-          <a:chExt cx="0" cy="0"/>
-        </a:xfrm>
-      </p:grpSpPr>
+      <p:grpSpPr/>
       <p:pic>
         <p:nvPicPr>
           <p:cNvPr id="2" name="Picture 1" descr="sih_content_bg.png"/>
@@ -6320,7 +6169,7 @@
           <a:lstStyle/>
           <a:p>
             <a:pPr>
-              <a:defRPr sz="1100" b="1">
+              <a:defRPr b="1" sz="1100">
                 <a:solidFill>
                   <a:srgbClr val="E65100"/>
                 </a:solidFill>
@@ -6355,7 +6204,7 @@
           <a:lstStyle/>
           <a:p>
             <a:pPr algn="r">
-              <a:defRPr sz="1000" b="1">
+              <a:defRPr b="1" sz="1000">
                 <a:solidFill>
                   <a:srgbClr val="1B365D"/>
                 </a:solidFill>
@@ -6390,7 +6239,7 @@
           <a:lstStyle/>
           <a:p>
             <a:pPr>
-              <a:defRPr sz="2100" b="1">
+              <a:defRPr b="1" sz="2100">
                 <a:solidFill>
                   <a:srgbClr val="1B365D"/>
                 </a:solidFill>
@@ -6460,7 +6309,7 @@
           <a:lstStyle/>
           <a:p>
             <a:pPr algn="r">
-              <a:defRPr sz="950" b="1">
+              <a:defRPr b="1" sz="950">
                 <a:solidFill>
                   <a:srgbClr val="1B365D"/>
                 </a:solidFill>
@@ -6510,11 +6359,11 @@
           </a:fontRef>
         </p:style>
         <p:txBody>
-          <a:bodyPr wrap="square" lIns="164592" tIns="137160" rtlCol="0" anchor="ctr"/>
+          <a:bodyPr rtlCol="0" anchor="ctr" wrap="square" lIns="164592" tIns="137160"/>
           <a:lstStyle/>
           <a:p>
             <a:pPr algn="ctr">
-              <a:defRPr sz="1150" b="1">
+              <a:defRPr b="1" sz="1150">
                 <a:solidFill>
                   <a:srgbClr val="008A4B"/>
                 </a:solidFill>
@@ -6636,11 +6485,11 @@
           </a:fontRef>
         </p:style>
         <p:txBody>
-          <a:bodyPr wrap="square" lIns="164592" tIns="137160" rtlCol="0" anchor="ctr"/>
+          <a:bodyPr rtlCol="0" anchor="ctr" wrap="square" lIns="164592" tIns="137160"/>
           <a:lstStyle/>
           <a:p>
             <a:pPr algn="ctr">
-              <a:defRPr sz="1150" b="1">
+              <a:defRPr b="1" sz="1150">
                 <a:solidFill>
                   <a:srgbClr val="1B365D"/>
                 </a:solidFill>
@@ -6762,11 +6611,11 @@
           </a:fontRef>
         </p:style>
         <p:txBody>
-          <a:bodyPr wrap="square" lIns="164592" tIns="137160" rtlCol="0" anchor="ctr"/>
+          <a:bodyPr rtlCol="0" anchor="ctr" wrap="square" lIns="164592" tIns="137160"/>
           <a:lstStyle/>
           <a:p>
             <a:pPr algn="ctr">
-              <a:defRPr sz="1150" b="1">
+              <a:defRPr b="1" sz="1150">
                 <a:solidFill>
                   <a:srgbClr val="E65100"/>
                 </a:solidFill>
@@ -6880,7 +6729,7 @@
           <a:lstStyle/>
           <a:p>
             <a:pPr algn="ctr">
-              <a:defRPr sz="1300" b="1">
+              <a:defRPr b="1" sz="1300">
                 <a:solidFill>
                   <a:srgbClr val="FFFFFF"/>
                 </a:solidFill>
